--- a/Day-10/Kafka_cap.pptx
+++ b/Day-10/Kafka_cap.pptx
@@ -5,7 +5,7 @@
     <p:sldMasterId id="2147483684" r:id="rId1"/>
   </p:sldMasterIdLst>
   <p:notesMasterIdLst>
-    <p:notesMasterId r:id="rId50"/>
+    <p:notesMasterId r:id="rId46"/>
   </p:notesMasterIdLst>
   <p:sldIdLst>
     <p:sldId id="322" r:id="rId2"/>
@@ -52,10 +52,6 @@
     <p:sldId id="290" r:id="rId43"/>
     <p:sldId id="291" r:id="rId44"/>
     <p:sldId id="292" r:id="rId45"/>
-    <p:sldId id="293" r:id="rId46"/>
-    <p:sldId id="294" r:id="rId47"/>
-    <p:sldId id="295" r:id="rId48"/>
-    <p:sldId id="296" r:id="rId49"/>
   </p:sldIdLst>
   <p:sldSz cx="9144000" cy="6858000" type="screen4x3"/>
   <p:notesSz cx="6858000" cy="9144000"/>
@@ -255,7 +251,7 @@
           <a:p>
             <a:fld id="{385635E3-F44D-4BD1-A257-95DC134779EB}" type="datetimeFigureOut">
               <a:rPr lang="en-IN" smtClean="0"/>
-              <a:t>24/05/2026</a:t>
+              <a:t>27/05/2026</a:t>
             </a:fld>
             <a:endParaRPr lang="en-IN"/>
           </a:p>
@@ -767,7 +763,7 @@
           <a:p>
             <a:fld id="{5BCAD085-E8A6-8845-BD4E-CB4CCA059FC4}" type="datetimeFigureOut">
               <a:rPr lang="en-US" smtClean="0"/>
-              <a:t>5/25/2026</a:t>
+              <a:t>5/27/2026</a:t>
             </a:fld>
             <a:endParaRPr lang="en-US"/>
           </a:p>
@@ -982,7 +978,7 @@
           <a:p>
             <a:fld id="{5BCAD085-E8A6-8845-BD4E-CB4CCA059FC4}" type="datetimeFigureOut">
               <a:rPr lang="en-US" smtClean="0"/>
-              <a:t>5/25/2026</a:t>
+              <a:t>5/27/2026</a:t>
             </a:fld>
             <a:endParaRPr lang="en-US"/>
           </a:p>
@@ -1170,7 +1166,7 @@
           <a:p>
             <a:fld id="{5BCAD085-E8A6-8845-BD4E-CB4CCA059FC4}" type="datetimeFigureOut">
               <a:rPr lang="en-US" smtClean="0"/>
-              <a:t>5/25/2026</a:t>
+              <a:t>5/27/2026</a:t>
             </a:fld>
             <a:endParaRPr lang="en-US"/>
           </a:p>
@@ -1383,7 +1379,7 @@
           <a:p>
             <a:fld id="{5BCAD085-E8A6-8845-BD4E-CB4CCA059FC4}" type="datetimeFigureOut">
               <a:rPr lang="en-US" smtClean="0"/>
-              <a:t>5/25/2026</a:t>
+              <a:t>5/27/2026</a:t>
             </a:fld>
             <a:endParaRPr lang="en-US"/>
           </a:p>
@@ -1648,7 +1644,7 @@
           <a:p>
             <a:fld id="{5BCAD085-E8A6-8845-BD4E-CB4CCA059FC4}" type="datetimeFigureOut">
               <a:rPr lang="en-US" smtClean="0"/>
-              <a:t>5/25/2026</a:t>
+              <a:t>5/27/2026</a:t>
             </a:fld>
             <a:endParaRPr lang="en-US"/>
           </a:p>
@@ -1930,7 +1926,7 @@
           <a:p>
             <a:fld id="{5BCAD085-E8A6-8845-BD4E-CB4CCA059FC4}" type="datetimeFigureOut">
               <a:rPr lang="en-US" smtClean="0"/>
-              <a:t>5/25/2026</a:t>
+              <a:t>5/27/2026</a:t>
             </a:fld>
             <a:endParaRPr lang="en-US"/>
           </a:p>
@@ -2341,7 +2337,7 @@
           <a:p>
             <a:fld id="{5BCAD085-E8A6-8845-BD4E-CB4CCA059FC4}" type="datetimeFigureOut">
               <a:rPr lang="en-US" smtClean="0"/>
-              <a:t>5/25/2026</a:t>
+              <a:t>5/27/2026</a:t>
             </a:fld>
             <a:endParaRPr lang="en-US"/>
           </a:p>
@@ -2467,7 +2463,7 @@
           <a:p>
             <a:fld id="{5BCAD085-E8A6-8845-BD4E-CB4CCA059FC4}" type="datetimeFigureOut">
               <a:rPr lang="en-US" smtClean="0"/>
-              <a:t>5/25/2026</a:t>
+              <a:t>5/27/2026</a:t>
             </a:fld>
             <a:endParaRPr lang="en-US"/>
           </a:p>
@@ -2570,7 +2566,7 @@
           <a:p>
             <a:fld id="{5BCAD085-E8A6-8845-BD4E-CB4CCA059FC4}" type="datetimeFigureOut">
               <a:rPr lang="en-US" smtClean="0"/>
-              <a:t>5/25/2026</a:t>
+              <a:t>5/27/2026</a:t>
             </a:fld>
             <a:endParaRPr lang="en-US"/>
           </a:p>
@@ -2870,7 +2866,7 @@
           <a:p>
             <a:fld id="{5BCAD085-E8A6-8845-BD4E-CB4CCA059FC4}" type="datetimeFigureOut">
               <a:rPr lang="en-US" smtClean="0"/>
-              <a:t>5/25/2026</a:t>
+              <a:t>5/27/2026</a:t>
             </a:fld>
             <a:endParaRPr lang="en-US"/>
           </a:p>
@@ -3158,7 +3154,7 @@
           <a:p>
             <a:fld id="{5BCAD085-E8A6-8845-BD4E-CB4CCA059FC4}" type="datetimeFigureOut">
               <a:rPr lang="en-US" smtClean="0"/>
-              <a:t>5/25/2026</a:t>
+              <a:t>5/27/2026</a:t>
             </a:fld>
             <a:endParaRPr lang="en-US"/>
           </a:p>
@@ -3411,7 +3407,7 @@
           <a:p>
             <a:fld id="{5BCAD085-E8A6-8845-BD4E-CB4CCA059FC4}" type="datetimeFigureOut">
               <a:rPr lang="en-US" smtClean="0"/>
-              <a:t>5/25/2026</a:t>
+              <a:t>5/27/2026</a:t>
             </a:fld>
             <a:endParaRPr lang="en-US"/>
           </a:p>
@@ -10580,416 +10576,6 @@
             </a:pPr>
             <a:r>
               <a:t>Enable alerting</a:t>
-            </a:r>
-          </a:p>
-        </p:txBody>
-      </p:sp>
-    </p:spTree>
-  </p:cSld>
-  <p:clrMapOvr>
-    <a:masterClrMapping/>
-  </p:clrMapOvr>
-</p:sld>
-</file>
-
-<file path=ppt/slides/slide45.xml><?xml version="1.0" encoding="utf-8"?>
-<p:sld xmlns:a="http://schemas.openxmlformats.org/drawingml/2006/main" xmlns:r="http://schemas.openxmlformats.org/officeDocument/2006/relationships" xmlns:p="http://schemas.openxmlformats.org/presentationml/2006/main">
-  <p:cSld>
-    <p:spTree>
-      <p:nvGrpSpPr>
-        <p:cNvPr id="1" name=""/>
-        <p:cNvGrpSpPr/>
-        <p:nvPr/>
-      </p:nvGrpSpPr>
-      <p:grpSpPr>
-        <a:xfrm>
-          <a:off x="0" y="0"/>
-          <a:ext cx="0" cy="0"/>
-          <a:chOff x="0" y="0"/>
-          <a:chExt cx="0" cy="0"/>
-        </a:xfrm>
-      </p:grpSpPr>
-      <p:sp>
-        <p:nvSpPr>
-          <p:cNvPr id="2" name="Title 1"/>
-          <p:cNvSpPr>
-            <a:spLocks noGrp="1"/>
-          </p:cNvSpPr>
-          <p:nvPr>
-            <p:ph type="title"/>
-          </p:nvPr>
-        </p:nvSpPr>
-        <p:spPr/>
-        <p:txBody>
-          <a:bodyPr/>
-          <a:lstStyle/>
-          <a:p>
-            <a:r>
-              <a:t>Capstone Deliverables</a:t>
-            </a:r>
-          </a:p>
-        </p:txBody>
-      </p:sp>
-      <p:sp>
-        <p:nvSpPr>
-          <p:cNvPr id="3" name="Content Placeholder 2"/>
-          <p:cNvSpPr>
-            <a:spLocks noGrp="1"/>
-          </p:cNvSpPr>
-          <p:nvPr>
-            <p:ph idx="1"/>
-          </p:nvPr>
-        </p:nvSpPr>
-        <p:spPr/>
-        <p:txBody>
-          <a:bodyPr/>
-          <a:lstStyle/>
-          <a:p>
-            <a:pPr>
-              <a:defRPr sz="1900"/>
-            </a:pPr>
-            <a:r>
-              <a:t>Working producer application</a:t>
-            </a:r>
-          </a:p>
-          <a:p>
-            <a:pPr>
-              <a:defRPr sz="1900"/>
-            </a:pPr>
-            <a:r>
-              <a:t>Running Kafka cluster</a:t>
-            </a:r>
-          </a:p>
-          <a:p>
-            <a:pPr>
-              <a:defRPr sz="1900"/>
-            </a:pPr>
-            <a:r>
-              <a:t>Kafka Streams processing logic</a:t>
-            </a:r>
-          </a:p>
-          <a:p>
-            <a:pPr>
-              <a:defRPr sz="1900"/>
-            </a:pPr>
-            <a:r>
-              <a:t>Database integration</a:t>
-            </a:r>
-          </a:p>
-          <a:p>
-            <a:pPr>
-              <a:defRPr sz="1900"/>
-            </a:pPr>
-            <a:r>
-              <a:t>Performance and monitoring reports</a:t>
-            </a:r>
-          </a:p>
-        </p:txBody>
-      </p:sp>
-    </p:spTree>
-  </p:cSld>
-  <p:clrMapOvr>
-    <a:masterClrMapping/>
-  </p:clrMapOvr>
-</p:sld>
-</file>
-
-<file path=ppt/slides/slide46.xml><?xml version="1.0" encoding="utf-8"?>
-<p:sld xmlns:a="http://schemas.openxmlformats.org/drawingml/2006/main" xmlns:r="http://schemas.openxmlformats.org/officeDocument/2006/relationships" xmlns:p="http://schemas.openxmlformats.org/presentationml/2006/main">
-  <p:cSld>
-    <p:spTree>
-      <p:nvGrpSpPr>
-        <p:cNvPr id="1" name=""/>
-        <p:cNvGrpSpPr/>
-        <p:nvPr/>
-      </p:nvGrpSpPr>
-      <p:grpSpPr>
-        <a:xfrm>
-          <a:off x="0" y="0"/>
-          <a:ext cx="0" cy="0"/>
-          <a:chOff x="0" y="0"/>
-          <a:chExt cx="0" cy="0"/>
-        </a:xfrm>
-      </p:grpSpPr>
-      <p:sp>
-        <p:nvSpPr>
-          <p:cNvPr id="2" name="Title 1"/>
-          <p:cNvSpPr>
-            <a:spLocks noGrp="1"/>
-          </p:cNvSpPr>
-          <p:nvPr>
-            <p:ph type="title"/>
-          </p:nvPr>
-        </p:nvSpPr>
-        <p:spPr/>
-        <p:txBody>
-          <a:bodyPr>
-            <a:normAutofit fontScale="90000"/>
-          </a:bodyPr>
-          <a:lstStyle/>
-          <a:p>
-            <a:r>
-              <a:t>Recommended Capstone Enhancements</a:t>
-            </a:r>
-          </a:p>
-        </p:txBody>
-      </p:sp>
-      <p:sp>
-        <p:nvSpPr>
-          <p:cNvPr id="3" name="Content Placeholder 2"/>
-          <p:cNvSpPr>
-            <a:spLocks noGrp="1"/>
-          </p:cNvSpPr>
-          <p:nvPr>
-            <p:ph idx="1"/>
-          </p:nvPr>
-        </p:nvSpPr>
-        <p:spPr/>
-        <p:txBody>
-          <a:bodyPr/>
-          <a:lstStyle/>
-          <a:p>
-            <a:pPr>
-              <a:defRPr sz="1900"/>
-            </a:pPr>
-            <a:r>
-              <a:t>Add Schema Registry</a:t>
-            </a:r>
-          </a:p>
-          <a:p>
-            <a:pPr>
-              <a:defRPr sz="1900"/>
-            </a:pPr>
-            <a:r>
-              <a:t>Enable security configurations</a:t>
-            </a:r>
-          </a:p>
-          <a:p>
-            <a:pPr>
-              <a:defRPr sz="1900"/>
-            </a:pPr>
-            <a:r>
-              <a:t>Deploy on Kubernetes</a:t>
-            </a:r>
-          </a:p>
-          <a:p>
-            <a:pPr>
-              <a:defRPr sz="1900"/>
-            </a:pPr>
-            <a:r>
-              <a:t>Integrate CI/CD pipelines</a:t>
-            </a:r>
-          </a:p>
-          <a:p>
-            <a:pPr>
-              <a:defRPr sz="1900"/>
-            </a:pPr>
-            <a:r>
-              <a:t>Add fault tolerance testing</a:t>
-            </a:r>
-          </a:p>
-        </p:txBody>
-      </p:sp>
-    </p:spTree>
-  </p:cSld>
-  <p:clrMapOvr>
-    <a:masterClrMapping/>
-  </p:clrMapOvr>
-</p:sld>
-</file>
-
-<file path=ppt/slides/slide47.xml><?xml version="1.0" encoding="utf-8"?>
-<p:sld xmlns:a="http://schemas.openxmlformats.org/drawingml/2006/main" xmlns:r="http://schemas.openxmlformats.org/officeDocument/2006/relationships" xmlns:p="http://schemas.openxmlformats.org/presentationml/2006/main">
-  <p:cSld>
-    <p:spTree>
-      <p:nvGrpSpPr>
-        <p:cNvPr id="1" name=""/>
-        <p:cNvGrpSpPr/>
-        <p:nvPr/>
-      </p:nvGrpSpPr>
-      <p:grpSpPr>
-        <a:xfrm>
-          <a:off x="0" y="0"/>
-          <a:ext cx="0" cy="0"/>
-          <a:chOff x="0" y="0"/>
-          <a:chExt cx="0" cy="0"/>
-        </a:xfrm>
-      </p:grpSpPr>
-      <p:sp>
-        <p:nvSpPr>
-          <p:cNvPr id="2" name="Title 1"/>
-          <p:cNvSpPr>
-            <a:spLocks noGrp="1"/>
-          </p:cNvSpPr>
-          <p:nvPr>
-            <p:ph type="title"/>
-          </p:nvPr>
-        </p:nvSpPr>
-        <p:spPr/>
-        <p:txBody>
-          <a:bodyPr/>
-          <a:lstStyle/>
-          <a:p>
-            <a:r>
-              <a:t>Interview Questions</a:t>
-            </a:r>
-          </a:p>
-        </p:txBody>
-      </p:sp>
-      <p:sp>
-        <p:nvSpPr>
-          <p:cNvPr id="3" name="Content Placeholder 2"/>
-          <p:cNvSpPr>
-            <a:spLocks noGrp="1"/>
-          </p:cNvSpPr>
-          <p:nvPr>
-            <p:ph idx="1"/>
-          </p:nvPr>
-        </p:nvSpPr>
-        <p:spPr/>
-        <p:txBody>
-          <a:bodyPr/>
-          <a:lstStyle/>
-          <a:p>
-            <a:pPr>
-              <a:defRPr sz="1900"/>
-            </a:pPr>
-            <a:r>
-              <a:t>How Kafka scales horizontally?</a:t>
-            </a:r>
-          </a:p>
-          <a:p>
-            <a:pPr>
-              <a:defRPr sz="1900"/>
-            </a:pPr>
-            <a:r>
-              <a:t>How to optimize Kafka throughput?</a:t>
-            </a:r>
-          </a:p>
-          <a:p>
-            <a:pPr>
-              <a:defRPr sz="1900"/>
-            </a:pPr>
-            <a:r>
-              <a:t>What causes consumer lag?</a:t>
-            </a:r>
-          </a:p>
-          <a:p>
-            <a:pPr>
-              <a:defRPr sz="1900"/>
-            </a:pPr>
-            <a:r>
-              <a:t>How Kafka works on Kubernetes?</a:t>
-            </a:r>
-          </a:p>
-          <a:p>
-            <a:pPr>
-              <a:defRPr sz="1900"/>
-            </a:pPr>
-            <a:r>
-              <a:t>Explain real-time streaming architecture</a:t>
-            </a:r>
-          </a:p>
-        </p:txBody>
-      </p:sp>
-    </p:spTree>
-  </p:cSld>
-  <p:clrMapOvr>
-    <a:masterClrMapping/>
-  </p:clrMapOvr>
-</p:sld>
-</file>
-
-<file path=ppt/slides/slide48.xml><?xml version="1.0" encoding="utf-8"?>
-<p:sld xmlns:a="http://schemas.openxmlformats.org/drawingml/2006/main" xmlns:r="http://schemas.openxmlformats.org/officeDocument/2006/relationships" xmlns:p="http://schemas.openxmlformats.org/presentationml/2006/main">
-  <p:cSld>
-    <p:spTree>
-      <p:nvGrpSpPr>
-        <p:cNvPr id="1" name=""/>
-        <p:cNvGrpSpPr/>
-        <p:nvPr/>
-      </p:nvGrpSpPr>
-      <p:grpSpPr>
-        <a:xfrm>
-          <a:off x="0" y="0"/>
-          <a:ext cx="0" cy="0"/>
-          <a:chOff x="0" y="0"/>
-          <a:chExt cx="0" cy="0"/>
-        </a:xfrm>
-      </p:grpSpPr>
-      <p:sp>
-        <p:nvSpPr>
-          <p:cNvPr id="2" name="Title 1"/>
-          <p:cNvSpPr>
-            <a:spLocks noGrp="1"/>
-          </p:cNvSpPr>
-          <p:nvPr>
-            <p:ph type="title"/>
-          </p:nvPr>
-        </p:nvSpPr>
-        <p:spPr/>
-        <p:txBody>
-          <a:bodyPr/>
-          <a:lstStyle/>
-          <a:p>
-            <a:r>
-              <a:t>Course Summary</a:t>
-            </a:r>
-          </a:p>
-        </p:txBody>
-      </p:sp>
-      <p:sp>
-        <p:nvSpPr>
-          <p:cNvPr id="3" name="Content Placeholder 2"/>
-          <p:cNvSpPr>
-            <a:spLocks noGrp="1"/>
-          </p:cNvSpPr>
-          <p:nvPr>
-            <p:ph idx="1"/>
-          </p:nvPr>
-        </p:nvSpPr>
-        <p:spPr/>
-        <p:txBody>
-          <a:bodyPr/>
-          <a:lstStyle/>
-          <a:p>
-            <a:pPr>
-              <a:defRPr sz="1900"/>
-            </a:pPr>
-            <a:r>
-              <a:t>Kafka enables scalable event streaming</a:t>
-            </a:r>
-          </a:p>
-          <a:p>
-            <a:pPr>
-              <a:defRPr sz="1900"/>
-            </a:pPr>
-            <a:r>
-              <a:t>Production deployments require tuning and monitoring</a:t>
-            </a:r>
-          </a:p>
-          <a:p>
-            <a:pPr>
-              <a:defRPr sz="1900"/>
-            </a:pPr>
-            <a:r>
-              <a:t>Kubernetes simplifies orchestration</a:t>
-            </a:r>
-          </a:p>
-          <a:p>
-            <a:pPr>
-              <a:defRPr sz="1900"/>
-            </a:pPr>
-            <a:r>
-              <a:t>Optimization improves throughput and reliability</a:t>
-            </a:r>
-          </a:p>
-          <a:p>
-            <a:pPr>
-              <a:defRPr sz="1900"/>
-            </a:pPr>
-            <a:r>
-              <a:t>End-to-end streaming systems power modern enterprises</a:t>
             </a:r>
           </a:p>
         </p:txBody>

--- a/Day-10/Kafka_cap.pptx
+++ b/Day-10/Kafka_cap.pptx
@@ -5,7 +5,7 @@
     <p:sldMasterId id="2147483684" r:id="rId1"/>
   </p:sldMasterIdLst>
   <p:notesMasterIdLst>
-    <p:notesMasterId r:id="rId46"/>
+    <p:notesMasterId r:id="rId40"/>
   </p:notesMasterIdLst>
   <p:sldIdLst>
     <p:sldId id="322" r:id="rId2"/>
@@ -46,12 +46,6 @@
     <p:sldId id="281" r:id="rId37"/>
     <p:sldId id="282" r:id="rId38"/>
     <p:sldId id="346" r:id="rId39"/>
-    <p:sldId id="287" r:id="rId40"/>
-    <p:sldId id="288" r:id="rId41"/>
-    <p:sldId id="289" r:id="rId42"/>
-    <p:sldId id="290" r:id="rId43"/>
-    <p:sldId id="291" r:id="rId44"/>
-    <p:sldId id="292" r:id="rId45"/>
   </p:sldIdLst>
   <p:sldSz cx="9144000" cy="6858000" type="screen4x3"/>
   <p:notesSz cx="6858000" cy="9144000"/>
@@ -251,7 +245,7 @@
           <a:p>
             <a:fld id="{385635E3-F44D-4BD1-A257-95DC134779EB}" type="datetimeFigureOut">
               <a:rPr lang="en-IN" smtClean="0"/>
-              <a:t>27/05/2026</a:t>
+              <a:t>29/05/2026</a:t>
             </a:fld>
             <a:endParaRPr lang="en-IN"/>
           </a:p>
@@ -763,7 +757,7 @@
           <a:p>
             <a:fld id="{5BCAD085-E8A6-8845-BD4E-CB4CCA059FC4}" type="datetimeFigureOut">
               <a:rPr lang="en-US" smtClean="0"/>
-              <a:t>5/27/2026</a:t>
+              <a:t>5/29/2026</a:t>
             </a:fld>
             <a:endParaRPr lang="en-US"/>
           </a:p>
@@ -978,7 +972,7 @@
           <a:p>
             <a:fld id="{5BCAD085-E8A6-8845-BD4E-CB4CCA059FC4}" type="datetimeFigureOut">
               <a:rPr lang="en-US" smtClean="0"/>
-              <a:t>5/27/2026</a:t>
+              <a:t>5/29/2026</a:t>
             </a:fld>
             <a:endParaRPr lang="en-US"/>
           </a:p>
@@ -1166,7 +1160,7 @@
           <a:p>
             <a:fld id="{5BCAD085-E8A6-8845-BD4E-CB4CCA059FC4}" type="datetimeFigureOut">
               <a:rPr lang="en-US" smtClean="0"/>
-              <a:t>5/27/2026</a:t>
+              <a:t>5/29/2026</a:t>
             </a:fld>
             <a:endParaRPr lang="en-US"/>
           </a:p>
@@ -1379,7 +1373,7 @@
           <a:p>
             <a:fld id="{5BCAD085-E8A6-8845-BD4E-CB4CCA059FC4}" type="datetimeFigureOut">
               <a:rPr lang="en-US" smtClean="0"/>
-              <a:t>5/27/2026</a:t>
+              <a:t>5/29/2026</a:t>
             </a:fld>
             <a:endParaRPr lang="en-US"/>
           </a:p>
@@ -1644,7 +1638,7 @@
           <a:p>
             <a:fld id="{5BCAD085-E8A6-8845-BD4E-CB4CCA059FC4}" type="datetimeFigureOut">
               <a:rPr lang="en-US" smtClean="0"/>
-              <a:t>5/27/2026</a:t>
+              <a:t>5/29/2026</a:t>
             </a:fld>
             <a:endParaRPr lang="en-US"/>
           </a:p>
@@ -1926,7 +1920,7 @@
           <a:p>
             <a:fld id="{5BCAD085-E8A6-8845-BD4E-CB4CCA059FC4}" type="datetimeFigureOut">
               <a:rPr lang="en-US" smtClean="0"/>
-              <a:t>5/27/2026</a:t>
+              <a:t>5/29/2026</a:t>
             </a:fld>
             <a:endParaRPr lang="en-US"/>
           </a:p>
@@ -2337,7 +2331,7 @@
           <a:p>
             <a:fld id="{5BCAD085-E8A6-8845-BD4E-CB4CCA059FC4}" type="datetimeFigureOut">
               <a:rPr lang="en-US" smtClean="0"/>
-              <a:t>5/27/2026</a:t>
+              <a:t>5/29/2026</a:t>
             </a:fld>
             <a:endParaRPr lang="en-US"/>
           </a:p>
@@ -2463,7 +2457,7 @@
           <a:p>
             <a:fld id="{5BCAD085-E8A6-8845-BD4E-CB4CCA059FC4}" type="datetimeFigureOut">
               <a:rPr lang="en-US" smtClean="0"/>
-              <a:t>5/27/2026</a:t>
+              <a:t>5/29/2026</a:t>
             </a:fld>
             <a:endParaRPr lang="en-US"/>
           </a:p>
@@ -2566,7 +2560,7 @@
           <a:p>
             <a:fld id="{5BCAD085-E8A6-8845-BD4E-CB4CCA059FC4}" type="datetimeFigureOut">
               <a:rPr lang="en-US" smtClean="0"/>
-              <a:t>5/27/2026</a:t>
+              <a:t>5/29/2026</a:t>
             </a:fld>
             <a:endParaRPr lang="en-US"/>
           </a:p>
@@ -2866,7 +2860,7 @@
           <a:p>
             <a:fld id="{5BCAD085-E8A6-8845-BD4E-CB4CCA059FC4}" type="datetimeFigureOut">
               <a:rPr lang="en-US" smtClean="0"/>
-              <a:t>5/27/2026</a:t>
+              <a:t>5/29/2026</a:t>
             </a:fld>
             <a:endParaRPr lang="en-US"/>
           </a:p>
@@ -3154,7 +3148,7 @@
           <a:p>
             <a:fld id="{5BCAD085-E8A6-8845-BD4E-CB4CCA059FC4}" type="datetimeFigureOut">
               <a:rPr lang="en-US" smtClean="0"/>
-              <a:t>5/27/2026</a:t>
+              <a:t>5/29/2026</a:t>
             </a:fld>
             <a:endParaRPr lang="en-US"/>
           </a:p>
@@ -3407,7 +3401,7 @@
           <a:p>
             <a:fld id="{5BCAD085-E8A6-8845-BD4E-CB4CCA059FC4}" type="datetimeFigureOut">
               <a:rPr lang="en-US" smtClean="0"/>
-              <a:t>5/27/2026</a:t>
+              <a:t>5/29/2026</a:t>
             </a:fld>
             <a:endParaRPr lang="en-US"/>
           </a:p>
@@ -3988,7 +3982,8 @@
           <a:lstStyle/>
           <a:p>
             <a:r>
-              <a:t>Kafka Production Deployment &amp; Capstone Project</a:t>
+              <a:rPr dirty="0"/>
+              <a:t>Kafka Production Deployment</a:t>
             </a:r>
           </a:p>
         </p:txBody>
@@ -9872,108 +9867,6 @@
 </p:sld>
 </file>
 
-<file path=ppt/slides/slide39.xml><?xml version="1.0" encoding="utf-8"?>
-<p:sld xmlns:a="http://schemas.openxmlformats.org/drawingml/2006/main" xmlns:r="http://schemas.openxmlformats.org/officeDocument/2006/relationships" xmlns:p="http://schemas.openxmlformats.org/presentationml/2006/main">
-  <p:cSld>
-    <p:spTree>
-      <p:nvGrpSpPr>
-        <p:cNvPr id="1" name=""/>
-        <p:cNvGrpSpPr/>
-        <p:nvPr/>
-      </p:nvGrpSpPr>
-      <p:grpSpPr>
-        <a:xfrm>
-          <a:off x="0" y="0"/>
-          <a:ext cx="0" cy="0"/>
-          <a:chOff x="0" y="0"/>
-          <a:chExt cx="0" cy="0"/>
-        </a:xfrm>
-      </p:grpSpPr>
-      <p:sp>
-        <p:nvSpPr>
-          <p:cNvPr id="2" name="Title 1"/>
-          <p:cNvSpPr>
-            <a:spLocks noGrp="1"/>
-          </p:cNvSpPr>
-          <p:nvPr>
-            <p:ph type="title"/>
-          </p:nvPr>
-        </p:nvSpPr>
-        <p:spPr/>
-        <p:txBody>
-          <a:bodyPr/>
-          <a:lstStyle/>
-          <a:p>
-            <a:r>
-              <a:t>Final Capstone Project Overview</a:t>
-            </a:r>
-          </a:p>
-        </p:txBody>
-      </p:sp>
-      <p:sp>
-        <p:nvSpPr>
-          <p:cNvPr id="3" name="Content Placeholder 2"/>
-          <p:cNvSpPr>
-            <a:spLocks noGrp="1"/>
-          </p:cNvSpPr>
-          <p:nvPr>
-            <p:ph idx="1"/>
-          </p:nvPr>
-        </p:nvSpPr>
-        <p:spPr/>
-        <p:txBody>
-          <a:bodyPr/>
-          <a:lstStyle/>
-          <a:p>
-            <a:pPr>
-              <a:defRPr sz="1900"/>
-            </a:pPr>
-            <a:r>
-              <a:t>Build complete real-time streaming system</a:t>
-            </a:r>
-          </a:p>
-          <a:p>
-            <a:pPr>
-              <a:defRPr sz="1900"/>
-            </a:pPr>
-            <a:r>
-              <a:t>Integrate producers, Kafka, streams, sinks, and monitoring</a:t>
-            </a:r>
-          </a:p>
-          <a:p>
-            <a:pPr>
-              <a:defRPr sz="1900"/>
-            </a:pPr>
-            <a:r>
-              <a:t>Apply all learned concepts</a:t>
-            </a:r>
-          </a:p>
-          <a:p>
-            <a:pPr>
-              <a:defRPr sz="1900"/>
-            </a:pPr>
-            <a:r>
-              <a:t>Implement scalable architecture</a:t>
-            </a:r>
-          </a:p>
-          <a:p>
-            <a:pPr>
-              <a:defRPr sz="1900"/>
-            </a:pPr>
-            <a:r>
-              <a:t>Present enterprise-grade solution</a:t>
-            </a:r>
-          </a:p>
-        </p:txBody>
-      </p:sp>
-    </p:spTree>
-  </p:cSld>
-  <p:clrMapOvr>
-    <a:masterClrMapping/>
-  </p:clrMapOvr>
-</p:sld>
-</file>
-
 <file path=ppt/slides/slide4.xml><?xml version="1.0" encoding="utf-8"?>
 <p:sld xmlns:a="http://schemas.openxmlformats.org/drawingml/2006/main" xmlns:r="http://schemas.openxmlformats.org/officeDocument/2006/relationships" xmlns:p="http://schemas.openxmlformats.org/presentationml/2006/main">
   <p:cSld>
@@ -10064,518 +9957,6 @@
             </a:pPr>
             <a:r>
               <a:t>Supports high availability</a:t>
-            </a:r>
-          </a:p>
-        </p:txBody>
-      </p:sp>
-    </p:spTree>
-  </p:cSld>
-  <p:clrMapOvr>
-    <a:masterClrMapping/>
-  </p:clrMapOvr>
-</p:sld>
-</file>
-
-<file path=ppt/slides/slide40.xml><?xml version="1.0" encoding="utf-8"?>
-<p:sld xmlns:a="http://schemas.openxmlformats.org/drawingml/2006/main" xmlns:r="http://schemas.openxmlformats.org/officeDocument/2006/relationships" xmlns:p="http://schemas.openxmlformats.org/presentationml/2006/main">
-  <p:cSld>
-    <p:spTree>
-      <p:nvGrpSpPr>
-        <p:cNvPr id="1" name=""/>
-        <p:cNvGrpSpPr/>
-        <p:nvPr/>
-      </p:nvGrpSpPr>
-      <p:grpSpPr>
-        <a:xfrm>
-          <a:off x="0" y="0"/>
-          <a:ext cx="0" cy="0"/>
-          <a:chOff x="0" y="0"/>
-          <a:chExt cx="0" cy="0"/>
-        </a:xfrm>
-      </p:grpSpPr>
-      <p:sp>
-        <p:nvSpPr>
-          <p:cNvPr id="2" name="Title 1"/>
-          <p:cNvSpPr>
-            <a:spLocks noGrp="1"/>
-          </p:cNvSpPr>
-          <p:nvPr>
-            <p:ph type="title"/>
-          </p:nvPr>
-        </p:nvSpPr>
-        <p:spPr/>
-        <p:txBody>
-          <a:bodyPr/>
-          <a:lstStyle/>
-          <a:p>
-            <a:r>
-              <a:t>Capstone Architecture</a:t>
-            </a:r>
-          </a:p>
-        </p:txBody>
-      </p:sp>
-      <p:sp>
-        <p:nvSpPr>
-          <p:cNvPr id="3" name="Content Placeholder 2"/>
-          <p:cNvSpPr>
-            <a:spLocks noGrp="1"/>
-          </p:cNvSpPr>
-          <p:nvPr>
-            <p:ph idx="1"/>
-          </p:nvPr>
-        </p:nvSpPr>
-        <p:spPr/>
-        <p:txBody>
-          <a:bodyPr/>
-          <a:lstStyle/>
-          <a:p>
-            <a:pPr>
-              <a:defRPr sz="1900"/>
-            </a:pPr>
-            <a:r>
-              <a:t>Producer Application</a:t>
-            </a:r>
-          </a:p>
-          <a:p>
-            <a:pPr>
-              <a:defRPr sz="1900"/>
-            </a:pPr>
-            <a:r>
-              <a:t>Kafka Cluster</a:t>
-            </a:r>
-          </a:p>
-          <a:p>
-            <a:pPr>
-              <a:defRPr sz="1900"/>
-            </a:pPr>
-            <a:r>
-              <a:t>Kafka Streams Processing</a:t>
-            </a:r>
-          </a:p>
-          <a:p>
-            <a:pPr>
-              <a:defRPr sz="1900"/>
-            </a:pPr>
-            <a:r>
-              <a:t>Database Sink</a:t>
-            </a:r>
-          </a:p>
-          <a:p>
-            <a:pPr>
-              <a:defRPr sz="1900"/>
-            </a:pPr>
-            <a:r>
-              <a:t>Monitoring Dashboard</a:t>
-            </a:r>
-          </a:p>
-        </p:txBody>
-      </p:sp>
-    </p:spTree>
-  </p:cSld>
-  <p:clrMapOvr>
-    <a:masterClrMapping/>
-  </p:clrMapOvr>
-</p:sld>
-</file>
-
-<file path=ppt/slides/slide41.xml><?xml version="1.0" encoding="utf-8"?>
-<p:sld xmlns:a="http://schemas.openxmlformats.org/drawingml/2006/main" xmlns:r="http://schemas.openxmlformats.org/officeDocument/2006/relationships" xmlns:p="http://schemas.openxmlformats.org/presentationml/2006/main">
-  <p:cSld>
-    <p:spTree>
-      <p:nvGrpSpPr>
-        <p:cNvPr id="1" name=""/>
-        <p:cNvGrpSpPr/>
-        <p:nvPr/>
-      </p:nvGrpSpPr>
-      <p:grpSpPr>
-        <a:xfrm>
-          <a:off x="0" y="0"/>
-          <a:ext cx="0" cy="0"/>
-          <a:chOff x="0" y="0"/>
-          <a:chExt cx="0" cy="0"/>
-        </a:xfrm>
-      </p:grpSpPr>
-      <p:sp>
-        <p:nvSpPr>
-          <p:cNvPr id="2" name="Title 1"/>
-          <p:cNvSpPr>
-            <a:spLocks noGrp="1"/>
-          </p:cNvSpPr>
-          <p:nvPr>
-            <p:ph type="title"/>
-          </p:nvPr>
-        </p:nvSpPr>
-        <p:spPr/>
-        <p:txBody>
-          <a:bodyPr/>
-          <a:lstStyle/>
-          <a:p>
-            <a:r>
-              <a:t>Capstone - Producer Application</a:t>
-            </a:r>
-          </a:p>
-        </p:txBody>
-      </p:sp>
-      <p:sp>
-        <p:nvSpPr>
-          <p:cNvPr id="3" name="Content Placeholder 2"/>
-          <p:cNvSpPr>
-            <a:spLocks noGrp="1"/>
-          </p:cNvSpPr>
-          <p:nvPr>
-            <p:ph idx="1"/>
-          </p:nvPr>
-        </p:nvSpPr>
-        <p:spPr/>
-        <p:txBody>
-          <a:bodyPr/>
-          <a:lstStyle/>
-          <a:p>
-            <a:pPr>
-              <a:defRPr sz="1900"/>
-            </a:pPr>
-            <a:r>
-              <a:t>Generate real-time events</a:t>
-            </a:r>
-          </a:p>
-          <a:p>
-            <a:pPr>
-              <a:defRPr sz="1900"/>
-            </a:pPr>
-            <a:r>
-              <a:t>Send data to Kafka topics</a:t>
-            </a:r>
-          </a:p>
-          <a:p>
-            <a:pPr>
-              <a:defRPr sz="1900"/>
-            </a:pPr>
-            <a:r>
-              <a:t>Use optimized producer configs</a:t>
-            </a:r>
-          </a:p>
-          <a:p>
-            <a:pPr>
-              <a:defRPr sz="1900"/>
-            </a:pPr>
-            <a:r>
-              <a:t>Handle retries and failures</a:t>
-            </a:r>
-          </a:p>
-          <a:p>
-            <a:pPr>
-              <a:defRPr sz="1900"/>
-            </a:pPr>
-            <a:r>
-              <a:t>Implement serialization</a:t>
-            </a:r>
-          </a:p>
-        </p:txBody>
-      </p:sp>
-    </p:spTree>
-  </p:cSld>
-  <p:clrMapOvr>
-    <a:masterClrMapping/>
-  </p:clrMapOvr>
-</p:sld>
-</file>
-
-<file path=ppt/slides/slide42.xml><?xml version="1.0" encoding="utf-8"?>
-<p:sld xmlns:a="http://schemas.openxmlformats.org/drawingml/2006/main" xmlns:r="http://schemas.openxmlformats.org/officeDocument/2006/relationships" xmlns:p="http://schemas.openxmlformats.org/presentationml/2006/main">
-  <p:cSld>
-    <p:spTree>
-      <p:nvGrpSpPr>
-        <p:cNvPr id="1" name=""/>
-        <p:cNvGrpSpPr/>
-        <p:nvPr/>
-      </p:nvGrpSpPr>
-      <p:grpSpPr>
-        <a:xfrm>
-          <a:off x="0" y="0"/>
-          <a:ext cx="0" cy="0"/>
-          <a:chOff x="0" y="0"/>
-          <a:chExt cx="0" cy="0"/>
-        </a:xfrm>
-      </p:grpSpPr>
-      <p:sp>
-        <p:nvSpPr>
-          <p:cNvPr id="2" name="Title 1"/>
-          <p:cNvSpPr>
-            <a:spLocks noGrp="1"/>
-          </p:cNvSpPr>
-          <p:nvPr>
-            <p:ph type="title"/>
-          </p:nvPr>
-        </p:nvSpPr>
-        <p:spPr/>
-        <p:txBody>
-          <a:bodyPr/>
-          <a:lstStyle/>
-          <a:p>
-            <a:r>
-              <a:t>Capstone - Kafka Streams Processing</a:t>
-            </a:r>
-          </a:p>
-        </p:txBody>
-      </p:sp>
-      <p:sp>
-        <p:nvSpPr>
-          <p:cNvPr id="3" name="Content Placeholder 2"/>
-          <p:cNvSpPr>
-            <a:spLocks noGrp="1"/>
-          </p:cNvSpPr>
-          <p:nvPr>
-            <p:ph idx="1"/>
-          </p:nvPr>
-        </p:nvSpPr>
-        <p:spPr/>
-        <p:txBody>
-          <a:bodyPr/>
-          <a:lstStyle/>
-          <a:p>
-            <a:pPr>
-              <a:defRPr sz="1900"/>
-            </a:pPr>
-            <a:r>
-              <a:t>Filter invalid records</a:t>
-            </a:r>
-          </a:p>
-          <a:p>
-            <a:pPr>
-              <a:defRPr sz="1900"/>
-            </a:pPr>
-            <a:r>
-              <a:t>Perform aggregations</a:t>
-            </a:r>
-          </a:p>
-          <a:p>
-            <a:pPr>
-              <a:defRPr sz="1900"/>
-            </a:pPr>
-            <a:r>
-              <a:t>Apply real-time analytics</a:t>
-            </a:r>
-          </a:p>
-          <a:p>
-            <a:pPr>
-              <a:defRPr sz="1900"/>
-            </a:pPr>
-            <a:r>
-              <a:t>Use windowing operations</a:t>
-            </a:r>
-          </a:p>
-          <a:p>
-            <a:pPr>
-              <a:defRPr sz="1900"/>
-            </a:pPr>
-            <a:r>
-              <a:t>Publish transformed data</a:t>
-            </a:r>
-          </a:p>
-        </p:txBody>
-      </p:sp>
-    </p:spTree>
-  </p:cSld>
-  <p:clrMapOvr>
-    <a:masterClrMapping/>
-  </p:clrMapOvr>
-</p:sld>
-</file>
-
-<file path=ppt/slides/slide43.xml><?xml version="1.0" encoding="utf-8"?>
-<p:sld xmlns:a="http://schemas.openxmlformats.org/drawingml/2006/main" xmlns:r="http://schemas.openxmlformats.org/officeDocument/2006/relationships" xmlns:p="http://schemas.openxmlformats.org/presentationml/2006/main">
-  <p:cSld>
-    <p:spTree>
-      <p:nvGrpSpPr>
-        <p:cNvPr id="1" name=""/>
-        <p:cNvGrpSpPr/>
-        <p:nvPr/>
-      </p:nvGrpSpPr>
-      <p:grpSpPr>
-        <a:xfrm>
-          <a:off x="0" y="0"/>
-          <a:ext cx="0" cy="0"/>
-          <a:chOff x="0" y="0"/>
-          <a:chExt cx="0" cy="0"/>
-        </a:xfrm>
-      </p:grpSpPr>
-      <p:sp>
-        <p:nvSpPr>
-          <p:cNvPr id="2" name="Title 1"/>
-          <p:cNvSpPr>
-            <a:spLocks noGrp="1"/>
-          </p:cNvSpPr>
-          <p:nvPr>
-            <p:ph type="title"/>
-          </p:nvPr>
-        </p:nvSpPr>
-        <p:spPr/>
-        <p:txBody>
-          <a:bodyPr/>
-          <a:lstStyle/>
-          <a:p>
-            <a:r>
-              <a:t>Capstone - Database Sink</a:t>
-            </a:r>
-          </a:p>
-        </p:txBody>
-      </p:sp>
-      <p:sp>
-        <p:nvSpPr>
-          <p:cNvPr id="3" name="Content Placeholder 2"/>
-          <p:cNvSpPr>
-            <a:spLocks noGrp="1"/>
-          </p:cNvSpPr>
-          <p:nvPr>
-            <p:ph idx="1"/>
-          </p:nvPr>
-        </p:nvSpPr>
-        <p:spPr/>
-        <p:txBody>
-          <a:bodyPr/>
-          <a:lstStyle/>
-          <a:p>
-            <a:pPr>
-              <a:defRPr sz="1900"/>
-            </a:pPr>
-            <a:r>
-              <a:t>Store processed records</a:t>
-            </a:r>
-          </a:p>
-          <a:p>
-            <a:pPr>
-              <a:defRPr sz="1900"/>
-            </a:pPr>
-            <a:r>
-              <a:t>Use JDBC or Elasticsearch sink</a:t>
-            </a:r>
-          </a:p>
-          <a:p>
-            <a:pPr>
-              <a:defRPr sz="1900"/>
-            </a:pPr>
-            <a:r>
-              <a:t>Enable analytics queries</a:t>
-            </a:r>
-          </a:p>
-          <a:p>
-            <a:pPr>
-              <a:defRPr sz="1900"/>
-            </a:pPr>
-            <a:r>
-              <a:t>Maintain schema compatibility</a:t>
-            </a:r>
-          </a:p>
-          <a:p>
-            <a:pPr>
-              <a:defRPr sz="1900"/>
-            </a:pPr>
-            <a:r>
-              <a:t>Verify end-to-end delivery</a:t>
-            </a:r>
-          </a:p>
-        </p:txBody>
-      </p:sp>
-    </p:spTree>
-  </p:cSld>
-  <p:clrMapOvr>
-    <a:masterClrMapping/>
-  </p:clrMapOvr>
-</p:sld>
-</file>
-
-<file path=ppt/slides/slide44.xml><?xml version="1.0" encoding="utf-8"?>
-<p:sld xmlns:a="http://schemas.openxmlformats.org/drawingml/2006/main" xmlns:r="http://schemas.openxmlformats.org/officeDocument/2006/relationships" xmlns:p="http://schemas.openxmlformats.org/presentationml/2006/main">
-  <p:cSld>
-    <p:spTree>
-      <p:nvGrpSpPr>
-        <p:cNvPr id="1" name=""/>
-        <p:cNvGrpSpPr/>
-        <p:nvPr/>
-      </p:nvGrpSpPr>
-      <p:grpSpPr>
-        <a:xfrm>
-          <a:off x="0" y="0"/>
-          <a:ext cx="0" cy="0"/>
-          <a:chOff x="0" y="0"/>
-          <a:chExt cx="0" cy="0"/>
-        </a:xfrm>
-      </p:grpSpPr>
-      <p:sp>
-        <p:nvSpPr>
-          <p:cNvPr id="2" name="Title 1"/>
-          <p:cNvSpPr>
-            <a:spLocks noGrp="1"/>
-          </p:cNvSpPr>
-          <p:nvPr>
-            <p:ph type="title"/>
-          </p:nvPr>
-        </p:nvSpPr>
-        <p:spPr/>
-        <p:txBody>
-          <a:bodyPr>
-            <a:normAutofit fontScale="90000"/>
-          </a:bodyPr>
-          <a:lstStyle/>
-          <a:p>
-            <a:r>
-              <a:t>Capstone - Monitoring Dashboard</a:t>
-            </a:r>
-          </a:p>
-        </p:txBody>
-      </p:sp>
-      <p:sp>
-        <p:nvSpPr>
-          <p:cNvPr id="3" name="Content Placeholder 2"/>
-          <p:cNvSpPr>
-            <a:spLocks noGrp="1"/>
-          </p:cNvSpPr>
-          <p:nvPr>
-            <p:ph idx="1"/>
-          </p:nvPr>
-        </p:nvSpPr>
-        <p:spPr/>
-        <p:txBody>
-          <a:bodyPr/>
-          <a:lstStyle/>
-          <a:p>
-            <a:pPr>
-              <a:defRPr sz="1900"/>
-            </a:pPr>
-            <a:r>
-              <a:t>Visualize Kafka metrics</a:t>
-            </a:r>
-          </a:p>
-          <a:p>
-            <a:pPr>
-              <a:defRPr sz="1900"/>
-            </a:pPr>
-            <a:r>
-              <a:t>Track throughput and lag</a:t>
-            </a:r>
-          </a:p>
-          <a:p>
-            <a:pPr>
-              <a:defRPr sz="1900"/>
-            </a:pPr>
-            <a:r>
-              <a:t>Create Grafana dashboards</a:t>
-            </a:r>
-          </a:p>
-          <a:p>
-            <a:pPr>
-              <a:defRPr sz="1900"/>
-            </a:pPr>
-            <a:r>
-              <a:t>Monitor stream processing</a:t>
-            </a:r>
-          </a:p>
-          <a:p>
-            <a:pPr>
-              <a:defRPr sz="1900"/>
-            </a:pPr>
-            <a:r>
-              <a:t>Enable alerting</a:t>
             </a:r>
           </a:p>
         </p:txBody>
